--- a/brag-output/sales-kit/sales-kit-deck.pptx
+++ b/brag-output/sales-kit/sales-kit-deck.pptx
@@ -1684,7 +1684,7 @@
         </p:nvSpPr>
         <p:spPr>
           <a:xfrm>
-            <a:off x="640080" y="1389888"/>
+            <a:off x="640080" y="1664208"/>
             <a:ext cx="54864" cy="1481328"/>
           </a:xfrm>
           <a:prstGeom prst="rect">
@@ -1704,7 +1704,7 @@
         </p:nvSpPr>
         <p:spPr>
           <a:xfrm>
-            <a:off x="868680" y="1298448"/>
+            <a:off x="868680" y="1572768"/>
             <a:ext cx="5486400" cy="320040"/>
           </a:xfrm>
           <a:prstGeom prst="rect">
@@ -1743,7 +1743,7 @@
         </p:nvSpPr>
         <p:spPr>
           <a:xfrm>
-            <a:off x="868680" y="1627632"/>
+            <a:off x="868680" y="1901952"/>
             <a:ext cx="7680960" cy="1371600"/>
           </a:xfrm>
           <a:prstGeom prst="rect">
@@ -1805,7 +1805,7 @@
         </p:nvSpPr>
         <p:spPr>
           <a:xfrm>
-            <a:off x="868680" y="3090672"/>
+            <a:off x="868680" y="3364992"/>
             <a:ext cx="6400800" cy="365760"/>
           </a:xfrm>
           <a:prstGeom prst="rect">
@@ -2115,7 +2115,7 @@
         <p:spPr>
           <a:xfrm>
             <a:off x="658368" y="1389888"/>
-            <a:ext cx="7863840" cy="548640"/>
+            <a:ext cx="8138160" cy="548640"/>
           </a:xfrm>
           <a:prstGeom prst="rect">
             <a:avLst/>
@@ -2136,13 +2136,13 @@
             <a:r>
               <a:rPr lang="en-US" sz="1300" dirty="0">
                 <a:solidFill>
-                  <a:srgbClr val="9C9285"/>
-                </a:solidFill>
-                <a:latin typeface="PingFang TC" pitchFamily="34" charset="0"/>
-                <a:ea typeface="PingFang TC" pitchFamily="34" charset="-122"/>
-                <a:cs typeface="PingFang TC" pitchFamily="34" charset="-120"/>
-              </a:rPr>
-              <a:t>不是銷售電話。會談本身就是合作的第一次體驗——我們會直接針對你現有的頁面給出具體判斷。聚焦三件事：</a:t>
+                  <a:srgbClr val="BDB4A6"/>
+                </a:solidFill>
+                <a:latin typeface="PingFang TC" pitchFamily="34" charset="0"/>
+                <a:ea typeface="PingFang TC" pitchFamily="34" charset="-122"/>
+                <a:cs typeface="PingFang TC" pitchFamily="34" charset="-120"/>
+              </a:rPr>
+              <a:t>不是銷售電話——會談本身就是合作的第一次體驗，我們會直接針對你現有的頁面給出具體判斷。聚焦三件事：</a:t>
             </a:r>
             <a:endParaRPr lang="en-US" sz="1300" dirty="0"/>
           </a:p>
@@ -2156,8 +2156,8 @@
         </p:nvSpPr>
         <p:spPr>
           <a:xfrm>
-            <a:off x="658368" y="2148840"/>
-            <a:ext cx="7827264" cy="530352"/>
+            <a:off x="658368" y="2084832"/>
+            <a:ext cx="7827264" cy="475488"/>
           </a:xfrm>
           <a:prstGeom prst="rect">
             <a:avLst/>
@@ -2181,8 +2181,8 @@
         </p:nvSpPr>
         <p:spPr>
           <a:xfrm>
-            <a:off x="914400" y="2240280"/>
-            <a:ext cx="548640" cy="365760"/>
+            <a:off x="914400" y="2157984"/>
+            <a:ext cx="548640" cy="347472"/>
           </a:xfrm>
           <a:prstGeom prst="rect">
             <a:avLst/>
@@ -2220,8 +2220,8 @@
         </p:nvSpPr>
         <p:spPr>
           <a:xfrm>
-            <a:off x="1508760" y="2249424"/>
-            <a:ext cx="6766560" cy="365760"/>
+            <a:off x="1508760" y="2167128"/>
+            <a:ext cx="6766560" cy="347472"/>
           </a:xfrm>
           <a:prstGeom prst="rect">
             <a:avLst/>
@@ -2259,8 +2259,8 @@
         </p:nvSpPr>
         <p:spPr>
           <a:xfrm>
-            <a:off x="658368" y="2807208"/>
-            <a:ext cx="7827264" cy="530352"/>
+            <a:off x="658368" y="2834640"/>
+            <a:ext cx="7827264" cy="475488"/>
           </a:xfrm>
           <a:prstGeom prst="rect">
             <a:avLst/>
@@ -2284,8 +2284,8 @@
         </p:nvSpPr>
         <p:spPr>
           <a:xfrm>
-            <a:off x="914400" y="2898648"/>
-            <a:ext cx="548640" cy="365760"/>
+            <a:off x="914400" y="2907792"/>
+            <a:ext cx="548640" cy="347472"/>
           </a:xfrm>
           <a:prstGeom prst="rect">
             <a:avLst/>
@@ -2323,8 +2323,8 @@
         </p:nvSpPr>
         <p:spPr>
           <a:xfrm>
-            <a:off x="1508760" y="2907792"/>
-            <a:ext cx="6766560" cy="365760"/>
+            <a:off x="1508760" y="2916936"/>
+            <a:ext cx="6766560" cy="347472"/>
           </a:xfrm>
           <a:prstGeom prst="rect">
             <a:avLst/>
@@ -2362,8 +2362,8 @@
         </p:nvSpPr>
         <p:spPr>
           <a:xfrm>
-            <a:off x="658368" y="3465576"/>
-            <a:ext cx="7827264" cy="530352"/>
+            <a:off x="658368" y="3584448"/>
+            <a:ext cx="7827264" cy="475488"/>
           </a:xfrm>
           <a:prstGeom prst="rect">
             <a:avLst/>
@@ -2387,8 +2387,8 @@
         </p:nvSpPr>
         <p:spPr>
           <a:xfrm>
-            <a:off x="914400" y="3557016"/>
-            <a:ext cx="548640" cy="365760"/>
+            <a:off x="914400" y="3657600"/>
+            <a:ext cx="548640" cy="347472"/>
           </a:xfrm>
           <a:prstGeom prst="rect">
             <a:avLst/>
@@ -2426,8 +2426,8 @@
         </p:nvSpPr>
         <p:spPr>
           <a:xfrm>
-            <a:off x="1508760" y="3566160"/>
-            <a:ext cx="6766560" cy="365760"/>
+            <a:off x="1508760" y="3666744"/>
+            <a:ext cx="6766560" cy="347472"/>
           </a:xfrm>
           <a:prstGeom prst="rect">
             <a:avLst/>
@@ -2465,7 +2465,7 @@
         </p:nvSpPr>
         <p:spPr>
           <a:xfrm>
-            <a:off x="658368" y="4224528"/>
+            <a:off x="658368" y="4407408"/>
             <a:ext cx="5120640" cy="320040"/>
           </a:xfrm>
           <a:prstGeom prst="rect">
@@ -2482,9 +2482,9 @@
               <a:buNone/>
             </a:pPr>
             <a:r>
-              <a:rPr lang="en-US" sz="1200" i="1" dirty="0">
-                <a:solidFill>
-                  <a:srgbClr val="9C9285"/>
+              <a:rPr lang="en-US" sz="1200" dirty="0">
+                <a:solidFill>
+                  <a:srgbClr val="F3EEE6"/>
                 </a:solidFill>
                 <a:latin typeface="PingFang TC" pitchFamily="34" charset="0"/>
                 <a:ea typeface="PingFang TC" pitchFamily="34" charset="-122"/>
@@ -2504,7 +2504,7 @@
         </p:nvSpPr>
         <p:spPr>
           <a:xfrm>
-            <a:off x="5120640" y="4224528"/>
+            <a:off x="5120640" y="4407408"/>
             <a:ext cx="3383280" cy="320040"/>
           </a:xfrm>
           <a:prstGeom prst="rect">
@@ -2734,7 +2734,7 @@
             <a:r>
               <a:rPr lang="en-US" sz="1350" dirty="0">
                 <a:solidFill>
-                  <a:srgbClr val="9C9285"/>
+                  <a:srgbClr val="BDB4A6"/>
                 </a:solidFill>
                 <a:latin typeface="PingFang TC" pitchFamily="34" charset="0"/>
                 <a:ea typeface="PingFang TC" pitchFamily="34" charset="-122"/>
@@ -2858,7 +2858,7 @@
         <p:spPr>
           <a:xfrm>
             <a:off x="886968" y="3547872"/>
-            <a:ext cx="2057400" cy="777240"/>
+            <a:ext cx="2103120" cy="777240"/>
           </a:xfrm>
           <a:prstGeom prst="rect">
             <a:avLst/>
@@ -2879,7 +2879,7 @@
             <a:r>
               <a:rPr lang="en-US" sz="1100" dirty="0">
                 <a:solidFill>
-                  <a:srgbClr val="9C9285"/>
+                  <a:srgbClr val="BDB4A6"/>
                 </a:solidFill>
                 <a:latin typeface="PingFang TC" pitchFamily="34" charset="0"/>
                 <a:ea typeface="PingFang TC" pitchFamily="34" charset="-122"/>
@@ -3003,7 +3003,7 @@
         <p:spPr>
           <a:xfrm>
             <a:off x="3602736" y="3547872"/>
-            <a:ext cx="2057400" cy="777240"/>
+            <a:ext cx="2103120" cy="777240"/>
           </a:xfrm>
           <a:prstGeom prst="rect">
             <a:avLst/>
@@ -3024,7 +3024,7 @@
             <a:r>
               <a:rPr lang="en-US" sz="1100" dirty="0">
                 <a:solidFill>
-                  <a:srgbClr val="9C9285"/>
+                  <a:srgbClr val="BDB4A6"/>
                 </a:solidFill>
                 <a:latin typeface="PingFang TC" pitchFamily="34" charset="0"/>
                 <a:ea typeface="PingFang TC" pitchFamily="34" charset="-122"/>
@@ -3148,7 +3148,7 @@
         <p:spPr>
           <a:xfrm>
             <a:off x="6318504" y="3547872"/>
-            <a:ext cx="2057400" cy="777240"/>
+            <a:ext cx="2103120" cy="777240"/>
           </a:xfrm>
           <a:prstGeom prst="rect">
             <a:avLst/>
@@ -3169,13 +3169,13 @@
             <a:r>
               <a:rPr lang="en-US" sz="1100" dirty="0">
                 <a:solidFill>
-                  <a:srgbClr val="9C9285"/>
-                </a:solidFill>
-                <a:latin typeface="PingFang TC" pitchFamily="34" charset="0"/>
-                <a:ea typeface="PingFang TC" pitchFamily="34" charset="-122"/>
-                <a:cs typeface="PingFang TC" pitchFamily="34" charset="-120"/>
-              </a:rPr>
-              <a:t>成熟可信的門面，縮短後續每一次銷售對話的距離。</a:t>
+                  <a:srgbClr val="BDB4A6"/>
+                </a:solidFill>
+                <a:latin typeface="PingFang TC" pitchFamily="34" charset="0"/>
+                <a:ea typeface="PingFang TC" pitchFamily="34" charset="-122"/>
+                <a:cs typeface="PingFang TC" pitchFamily="34" charset="-120"/>
+              </a:rPr>
+              <a:t>成熟可信的門面，縮短之後每一次銷售對話的距離。</a:t>
             </a:r>
             <a:endParaRPr lang="en-US" sz="1100" dirty="0"/>
           </a:p>
@@ -3359,7 +3359,7 @@
         <p:spPr>
           <a:xfrm>
             <a:off x="658368" y="1481328"/>
-            <a:ext cx="3858768" cy="1389888"/>
+            <a:ext cx="3749040" cy="1325880"/>
           </a:xfrm>
           <a:prstGeom prst="rect">
             <a:avLst/>
@@ -3384,7 +3384,7 @@
         <p:spPr>
           <a:xfrm>
             <a:off x="658368" y="1481328"/>
-            <a:ext cx="41148" cy="1389888"/>
+            <a:ext cx="41148" cy="1325880"/>
           </a:xfrm>
           <a:prstGeom prst="rect">
             <a:avLst/>
@@ -3403,8 +3403,8 @@
         </p:nvSpPr>
         <p:spPr>
           <a:xfrm>
-            <a:off x="914400" y="1682496"/>
-            <a:ext cx="3383280" cy="320040"/>
+            <a:off x="914400" y="1664208"/>
+            <a:ext cx="3291840" cy="320040"/>
           </a:xfrm>
           <a:prstGeom prst="rect">
             <a:avLst/>
@@ -3442,8 +3442,8 @@
         </p:nvSpPr>
         <p:spPr>
           <a:xfrm>
-            <a:off x="914400" y="2048256"/>
-            <a:ext cx="3383280" cy="685800"/>
+            <a:off x="914400" y="2029968"/>
+            <a:ext cx="3291840" cy="640080"/>
           </a:xfrm>
           <a:prstGeom prst="rect">
             <a:avLst/>
@@ -3464,7 +3464,7 @@
             <a:r>
               <a:rPr lang="en-US" sz="1100" dirty="0">
                 <a:solidFill>
-                  <a:srgbClr val="9C9285"/>
+                  <a:srgbClr val="BDB4A6"/>
                 </a:solidFill>
                 <a:latin typeface="PingFang TC" pitchFamily="34" charset="0"/>
                 <a:ea typeface="PingFang TC" pitchFamily="34" charset="-122"/>
@@ -3484,8 +3484,8 @@
         </p:nvSpPr>
         <p:spPr>
           <a:xfrm>
-            <a:off x="4745736" y="1481328"/>
-            <a:ext cx="3858768" cy="1389888"/>
+            <a:off x="4736592" y="1481328"/>
+            <a:ext cx="3749040" cy="1325880"/>
           </a:xfrm>
           <a:prstGeom prst="rect">
             <a:avLst/>
@@ -3509,8 +3509,8 @@
         </p:nvSpPr>
         <p:spPr>
           <a:xfrm>
-            <a:off x="4745736" y="1481328"/>
-            <a:ext cx="41148" cy="1389888"/>
+            <a:off x="4736592" y="1481328"/>
+            <a:ext cx="41148" cy="1325880"/>
           </a:xfrm>
           <a:prstGeom prst="rect">
             <a:avLst/>
@@ -3529,8 +3529,8 @@
         </p:nvSpPr>
         <p:spPr>
           <a:xfrm>
-            <a:off x="5001768" y="1682496"/>
-            <a:ext cx="3383280" cy="320040"/>
+            <a:off x="4992624" y="1664208"/>
+            <a:ext cx="3291840" cy="320040"/>
           </a:xfrm>
           <a:prstGeom prst="rect">
             <a:avLst/>
@@ -3568,8 +3568,8 @@
         </p:nvSpPr>
         <p:spPr>
           <a:xfrm>
-            <a:off x="5001768" y="2048256"/>
-            <a:ext cx="3383280" cy="685800"/>
+            <a:off x="4992624" y="2029968"/>
+            <a:ext cx="3291840" cy="640080"/>
           </a:xfrm>
           <a:prstGeom prst="rect">
             <a:avLst/>
@@ -3590,7 +3590,7 @@
             <a:r>
               <a:rPr lang="en-US" sz="1100" dirty="0">
                 <a:solidFill>
-                  <a:srgbClr val="9C9285"/>
+                  <a:srgbClr val="BDB4A6"/>
                 </a:solidFill>
                 <a:latin typeface="PingFang TC" pitchFamily="34" charset="0"/>
                 <a:ea typeface="PingFang TC" pitchFamily="34" charset="-122"/>
@@ -3610,8 +3610,8 @@
         </p:nvSpPr>
         <p:spPr>
           <a:xfrm>
-            <a:off x="658368" y="3054096"/>
-            <a:ext cx="3858768" cy="1389888"/>
+            <a:off x="658368" y="3127248"/>
+            <a:ext cx="3749040" cy="1325880"/>
           </a:xfrm>
           <a:prstGeom prst="rect">
             <a:avLst/>
@@ -3635,8 +3635,8 @@
         </p:nvSpPr>
         <p:spPr>
           <a:xfrm>
-            <a:off x="658368" y="3054096"/>
-            <a:ext cx="41148" cy="1389888"/>
+            <a:off x="658368" y="3127248"/>
+            <a:ext cx="41148" cy="1325880"/>
           </a:xfrm>
           <a:prstGeom prst="rect">
             <a:avLst/>
@@ -3655,8 +3655,8 @@
         </p:nvSpPr>
         <p:spPr>
           <a:xfrm>
-            <a:off x="914400" y="3255264"/>
-            <a:ext cx="3383280" cy="320040"/>
+            <a:off x="914400" y="3310128"/>
+            <a:ext cx="3291840" cy="320040"/>
           </a:xfrm>
           <a:prstGeom prst="rect">
             <a:avLst/>
@@ -3694,8 +3694,8 @@
         </p:nvSpPr>
         <p:spPr>
           <a:xfrm>
-            <a:off x="914400" y="3621024"/>
-            <a:ext cx="3383280" cy="685800"/>
+            <a:off x="914400" y="3675888"/>
+            <a:ext cx="3291840" cy="640080"/>
           </a:xfrm>
           <a:prstGeom prst="rect">
             <a:avLst/>
@@ -3716,7 +3716,7 @@
             <a:r>
               <a:rPr lang="en-US" sz="1100" dirty="0">
                 <a:solidFill>
-                  <a:srgbClr val="9C9285"/>
+                  <a:srgbClr val="BDB4A6"/>
                 </a:solidFill>
                 <a:latin typeface="PingFang TC" pitchFamily="34" charset="0"/>
                 <a:ea typeface="PingFang TC" pitchFamily="34" charset="-122"/>
@@ -3736,8 +3736,8 @@
         </p:nvSpPr>
         <p:spPr>
           <a:xfrm>
-            <a:off x="4745736" y="3054096"/>
-            <a:ext cx="3858768" cy="1389888"/>
+            <a:off x="4736592" y="3127248"/>
+            <a:ext cx="3749040" cy="1325880"/>
           </a:xfrm>
           <a:prstGeom prst="rect">
             <a:avLst/>
@@ -3761,8 +3761,8 @@
         </p:nvSpPr>
         <p:spPr>
           <a:xfrm>
-            <a:off x="4745736" y="3054096"/>
-            <a:ext cx="41148" cy="1389888"/>
+            <a:off x="4736592" y="3127248"/>
+            <a:ext cx="41148" cy="1325880"/>
           </a:xfrm>
           <a:prstGeom prst="rect">
             <a:avLst/>
@@ -3781,8 +3781,8 @@
         </p:nvSpPr>
         <p:spPr>
           <a:xfrm>
-            <a:off x="5001768" y="3255264"/>
-            <a:ext cx="3383280" cy="320040"/>
+            <a:off x="4992624" y="3310128"/>
+            <a:ext cx="3291840" cy="320040"/>
           </a:xfrm>
           <a:prstGeom prst="rect">
             <a:avLst/>
@@ -3820,8 +3820,8 @@
         </p:nvSpPr>
         <p:spPr>
           <a:xfrm>
-            <a:off x="5001768" y="3621024"/>
-            <a:ext cx="3383280" cy="685800"/>
+            <a:off x="4992624" y="3675888"/>
+            <a:ext cx="3291840" cy="640080"/>
           </a:xfrm>
           <a:prstGeom prst="rect">
             <a:avLst/>
@@ -3842,7 +3842,7 @@
             <a:r>
               <a:rPr lang="en-US" sz="1100" dirty="0">
                 <a:solidFill>
-                  <a:srgbClr val="9C9285"/>
+                  <a:srgbClr val="BDB4A6"/>
                 </a:solidFill>
                 <a:latin typeface="PingFang TC" pitchFamily="34" charset="0"/>
                 <a:ea typeface="PingFang TC" pitchFamily="34" charset="-122"/>
@@ -4039,7 +4039,7 @@
         <p:spPr>
           <a:xfrm>
             <a:off x="658368" y="1481328"/>
-            <a:ext cx="3858768" cy="2411730"/>
+            <a:ext cx="3749040" cy="2343150"/>
           </a:xfrm>
           <a:prstGeom prst="rect">
             <a:avLst/>
@@ -4055,7 +4055,7 @@
         <p:spPr>
           <a:xfrm>
             <a:off x="658368" y="1481328"/>
-            <a:ext cx="3858768" cy="2411730"/>
+            <a:ext cx="3749040" cy="2343150"/>
           </a:xfrm>
           <a:prstGeom prst="rect">
             <a:avLst/>
@@ -4081,8 +4081,8 @@
         </p:nvSpPr>
         <p:spPr>
           <a:xfrm>
-            <a:off x="658368" y="4005072"/>
-            <a:ext cx="3858768" cy="274320"/>
+            <a:off x="658368" y="3950208"/>
+            <a:ext cx="3749040" cy="274320"/>
           </a:xfrm>
           <a:prstGeom prst="rect">
             <a:avLst/>
@@ -4120,8 +4120,8 @@
         </p:nvSpPr>
         <p:spPr>
           <a:xfrm>
-            <a:off x="658368" y="4279392"/>
-            <a:ext cx="3858768" cy="256032"/>
+            <a:off x="658368" y="4224528"/>
+            <a:ext cx="3749040" cy="256032"/>
           </a:xfrm>
           <a:prstGeom prst="rect">
             <a:avLst/>
@@ -4166,8 +4166,8 @@
         </p:blipFill>
         <p:spPr>
           <a:xfrm>
-            <a:off x="4745736" y="1481328"/>
-            <a:ext cx="3858768" cy="2411730"/>
+            <a:off x="4736592" y="1481328"/>
+            <a:ext cx="3749040" cy="2343150"/>
           </a:xfrm>
           <a:prstGeom prst="rect">
             <a:avLst/>
@@ -4182,8 +4182,8 @@
         </p:nvSpPr>
         <p:spPr>
           <a:xfrm>
-            <a:off x="4745736" y="1481328"/>
-            <a:ext cx="3858768" cy="2411730"/>
+            <a:off x="4736592" y="1481328"/>
+            <a:ext cx="3749040" cy="2343150"/>
           </a:xfrm>
           <a:prstGeom prst="rect">
             <a:avLst/>
@@ -4209,8 +4209,8 @@
         </p:nvSpPr>
         <p:spPr>
           <a:xfrm>
-            <a:off x="4745736" y="4005072"/>
-            <a:ext cx="3858768" cy="274320"/>
+            <a:off x="4736592" y="3950208"/>
+            <a:ext cx="3749040" cy="274320"/>
           </a:xfrm>
           <a:prstGeom prst="rect">
             <a:avLst/>
@@ -4248,8 +4248,8 @@
         </p:nvSpPr>
         <p:spPr>
           <a:xfrm>
-            <a:off x="4745736" y="4279392"/>
-            <a:ext cx="3858768" cy="256032"/>
+            <a:off x="4736592" y="4224528"/>
+            <a:ext cx="3749040" cy="256032"/>
           </a:xfrm>
           <a:prstGeom prst="rect">
             <a:avLst/>
@@ -4403,7 +4403,7 @@
                 <a:ea typeface="PingFang TC" pitchFamily="34" charset="-122"/>
                 <a:cs typeface="PingFang TC" pitchFamily="34" charset="-120"/>
               </a:rPr>
-              <a:t>法式香水 × 精品咖啡——四種產業，同一套方法</a:t>
+              <a:t>法式香水 × 精品咖啡（四種產業，同一套方法）</a:t>
             </a:r>
             <a:endParaRPr lang="en-US" sz="2300" dirty="0"/>
           </a:p>
@@ -4450,7 +4450,7 @@
       </p:sp>
       <p:pic>
         <p:nvPicPr>
-          <p:cNvPr id="6" name="Image 0" descr="/private/tmp/claude-501/-Users-gangshuanfan-Documents-github-claude-mobile/683b6064-c8f4-4a69-86ec-30782b989115/scratchpad/shots/noir-ambre.png">    </p:cNvPr>
+          <p:cNvPr id="6" name="Image 0" descr="/private/tmp/claude-501/-Users-gangshuanfan-Documents-github-claude-mobile/683b6064-c8f4-4a69-86ec-30782b989115/scratchpad/shots/noir-ambre-crop.png">    </p:cNvPr>
           <p:cNvPicPr>
             <a:picLocks noChangeAspect="1"/>
           </p:cNvPicPr>
@@ -4464,7 +4464,7 @@
         <p:spPr>
           <a:xfrm>
             <a:off x="658368" y="1481328"/>
-            <a:ext cx="3858768" cy="2411730"/>
+            <a:ext cx="3749040" cy="2343150"/>
           </a:xfrm>
           <a:prstGeom prst="rect">
             <a:avLst/>
@@ -4480,7 +4480,7 @@
         <p:spPr>
           <a:xfrm>
             <a:off x="658368" y="1481328"/>
-            <a:ext cx="3858768" cy="2411730"/>
+            <a:ext cx="3749040" cy="2343150"/>
           </a:xfrm>
           <a:prstGeom prst="rect">
             <a:avLst/>
@@ -4506,8 +4506,8 @@
         </p:nvSpPr>
         <p:spPr>
           <a:xfrm>
-            <a:off x="658368" y="4005072"/>
-            <a:ext cx="3858768" cy="274320"/>
+            <a:off x="658368" y="3950208"/>
+            <a:ext cx="3749040" cy="274320"/>
           </a:xfrm>
           <a:prstGeom prst="rect">
             <a:avLst/>
@@ -4545,8 +4545,8 @@
         </p:nvSpPr>
         <p:spPr>
           <a:xfrm>
-            <a:off x="658368" y="4279392"/>
-            <a:ext cx="3858768" cy="256032"/>
+            <a:off x="658368" y="4224528"/>
+            <a:ext cx="3749040" cy="256032"/>
           </a:xfrm>
           <a:prstGeom prst="rect">
             <a:avLst/>
@@ -4591,8 +4591,8 @@
         </p:blipFill>
         <p:spPr>
           <a:xfrm>
-            <a:off x="4745736" y="1481328"/>
-            <a:ext cx="3858768" cy="2411730"/>
+            <a:off x="4736592" y="1481328"/>
+            <a:ext cx="3749040" cy="2343150"/>
           </a:xfrm>
           <a:prstGeom prst="rect">
             <a:avLst/>
@@ -4607,8 +4607,8 @@
         </p:nvSpPr>
         <p:spPr>
           <a:xfrm>
-            <a:off x="4745736" y="1481328"/>
-            <a:ext cx="3858768" cy="2411730"/>
+            <a:off x="4736592" y="1481328"/>
+            <a:ext cx="3749040" cy="2343150"/>
           </a:xfrm>
           <a:prstGeom prst="rect">
             <a:avLst/>
@@ -4634,8 +4634,8 @@
         </p:nvSpPr>
         <p:spPr>
           <a:xfrm>
-            <a:off x="4745736" y="4005072"/>
-            <a:ext cx="3858768" cy="274320"/>
+            <a:off x="4736592" y="3950208"/>
+            <a:ext cx="3749040" cy="274320"/>
           </a:xfrm>
           <a:prstGeom prst="rect">
             <a:avLst/>
@@ -4673,8 +4673,8 @@
         </p:nvSpPr>
         <p:spPr>
           <a:xfrm>
-            <a:off x="4745736" y="4279392"/>
-            <a:ext cx="3858768" cy="256032"/>
+            <a:off x="4736592" y="4224528"/>
+            <a:ext cx="3749040" cy="256032"/>
           </a:xfrm>
           <a:prstGeom prst="rect">
             <a:avLst/>
@@ -4881,7 +4881,7 @@
         </p:nvSpPr>
         <p:spPr>
           <a:xfrm>
-            <a:off x="658368" y="1481328"/>
+            <a:off x="658368" y="1499616"/>
             <a:ext cx="1554480" cy="320040"/>
           </a:xfrm>
           <a:prstGeom prst="rect">
@@ -4920,7 +4920,7 @@
         </p:nvSpPr>
         <p:spPr>
           <a:xfrm>
-            <a:off x="2240280" y="1481328"/>
+            <a:off x="2240280" y="1499616"/>
             <a:ext cx="2148840" cy="320040"/>
           </a:xfrm>
           <a:prstGeom prst="rect">
@@ -4959,8 +4959,8 @@
         </p:nvSpPr>
         <p:spPr>
           <a:xfrm>
-            <a:off x="4526280" y="1444752"/>
-            <a:ext cx="3959352" cy="566928"/>
+            <a:off x="4434840" y="1499616"/>
+            <a:ext cx="4050792" cy="530352"/>
           </a:xfrm>
           <a:prstGeom prst="rect">
             <a:avLst/>
@@ -4981,7 +4981,7 @@
             <a:r>
               <a:rPr lang="en-US" sz="1050" dirty="0">
                 <a:solidFill>
-                  <a:srgbClr val="9C9285"/>
+                  <a:srgbClr val="BDB4A6"/>
                 </a:solidFill>
                 <a:latin typeface="PingFang TC" pitchFamily="34" charset="0"/>
                 <a:ea typeface="PingFang TC" pitchFamily="34" charset="-122"/>
@@ -5024,7 +5024,7 @@
         </p:nvSpPr>
         <p:spPr>
           <a:xfrm>
-            <a:off x="658368" y="2194560"/>
+            <a:off x="658368" y="2212848"/>
             <a:ext cx="1554480" cy="320040"/>
           </a:xfrm>
           <a:prstGeom prst="rect">
@@ -5063,7 +5063,7 @@
         </p:nvSpPr>
         <p:spPr>
           <a:xfrm>
-            <a:off x="2240280" y="2194560"/>
+            <a:off x="2240280" y="2212848"/>
             <a:ext cx="2148840" cy="320040"/>
           </a:xfrm>
           <a:prstGeom prst="rect">
@@ -5102,8 +5102,8 @@
         </p:nvSpPr>
         <p:spPr>
           <a:xfrm>
-            <a:off x="4526280" y="2157984"/>
-            <a:ext cx="3959352" cy="566928"/>
+            <a:off x="4434840" y="2212848"/>
+            <a:ext cx="4050792" cy="530352"/>
           </a:xfrm>
           <a:prstGeom prst="rect">
             <a:avLst/>
@@ -5124,13 +5124,13 @@
             <a:r>
               <a:rPr lang="en-US" sz="1050" dirty="0">
                 <a:solidFill>
-                  <a:srgbClr val="9C9285"/>
-                </a:solidFill>
-                <a:latin typeface="PingFang TC" pitchFamily="34" charset="0"/>
-                <a:ea typeface="PingFang TC" pitchFamily="34" charset="-122"/>
-                <a:cs typeface="PingFang TC" pitchFamily="34" charset="-120"/>
-              </a:rPr>
-              <a:t>方向明確、素材齊備的聚焦型單頁。含完整敘事架構與 scroll 節奏設計。</a:t>
+                  <a:srgbClr val="BDB4A6"/>
+                </a:solidFill>
+                <a:latin typeface="PingFang TC" pitchFamily="34" charset="0"/>
+                <a:ea typeface="PingFang TC" pitchFamily="34" charset="-122"/>
+                <a:cs typeface="PingFang TC" pitchFamily="34" charset="-120"/>
+              </a:rPr>
+              <a:t>方向明確、素材齊備的聚焦型單頁。含完整敘事架構與捲動節奏設計。</a:t>
             </a:r>
             <a:endParaRPr lang="en-US" sz="1050" dirty="0"/>
           </a:p>
@@ -5167,7 +5167,7 @@
         </p:nvSpPr>
         <p:spPr>
           <a:xfrm>
-            <a:off x="658368" y="2907792"/>
+            <a:off x="658368" y="2926080"/>
             <a:ext cx="1554480" cy="320040"/>
           </a:xfrm>
           <a:prstGeom prst="rect">
@@ -5206,7 +5206,7 @@
         </p:nvSpPr>
         <p:spPr>
           <a:xfrm>
-            <a:off x="2240280" y="2907792"/>
+            <a:off x="2240280" y="2926080"/>
             <a:ext cx="2148840" cy="320040"/>
           </a:xfrm>
           <a:prstGeom prst="rect">
@@ -5245,8 +5245,8 @@
         </p:nvSpPr>
         <p:spPr>
           <a:xfrm>
-            <a:off x="4526280" y="2871216"/>
-            <a:ext cx="3959352" cy="566928"/>
+            <a:off x="4434840" y="2926080"/>
+            <a:ext cx="4050792" cy="530352"/>
           </a:xfrm>
           <a:prstGeom prst="rect">
             <a:avLst/>
@@ -5267,7 +5267,7 @@
             <a:r>
               <a:rPr lang="en-US" sz="1050" dirty="0">
                 <a:solidFill>
-                  <a:srgbClr val="9C9285"/>
+                  <a:srgbClr val="BDB4A6"/>
                 </a:solidFill>
                 <a:latin typeface="PingFang TC" pitchFamily="34" charset="0"/>
                 <a:ea typeface="PingFang TC" pitchFamily="34" charset="-122"/>
@@ -5310,7 +5310,7 @@
         </p:nvSpPr>
         <p:spPr>
           <a:xfrm>
-            <a:off x="658368" y="3621024"/>
+            <a:off x="658368" y="3639312"/>
             <a:ext cx="1554480" cy="320040"/>
           </a:xfrm>
           <a:prstGeom prst="rect">
@@ -5349,7 +5349,7 @@
         </p:nvSpPr>
         <p:spPr>
           <a:xfrm>
-            <a:off x="2240280" y="3621024"/>
+            <a:off x="2240280" y="3639312"/>
             <a:ext cx="2148840" cy="320040"/>
           </a:xfrm>
           <a:prstGeom prst="rect">
@@ -5388,8 +5388,8 @@
         </p:nvSpPr>
         <p:spPr>
           <a:xfrm>
-            <a:off x="4526280" y="3584448"/>
-            <a:ext cx="3959352" cy="566928"/>
+            <a:off x="4434840" y="3639312"/>
+            <a:ext cx="4050792" cy="530352"/>
           </a:xfrm>
           <a:prstGeom prst="rect">
             <a:avLst/>
@@ -5410,7 +5410,7 @@
             <a:r>
               <a:rPr lang="en-US" sz="1050" dirty="0">
                 <a:solidFill>
-                  <a:srgbClr val="9C9285"/>
+                  <a:srgbClr val="BDB4A6"/>
                 </a:solidFill>
                 <a:latin typeface="PingFang TC" pitchFamily="34" charset="0"/>
                 <a:ea typeface="PingFang TC" pitchFamily="34" charset="-122"/>
@@ -5430,7 +5430,7 @@
         </p:nvSpPr>
         <p:spPr>
           <a:xfrm>
-            <a:off x="658368" y="4343400"/>
+            <a:off x="658368" y="4370832"/>
             <a:ext cx="7827264" cy="502920"/>
           </a:xfrm>
           <a:prstGeom prst="rect">
@@ -5660,7 +5660,7 @@
             <a:r>
               <a:rPr lang="en-US" sz="1300" dirty="0">
                 <a:solidFill>
-                  <a:srgbClr val="9C9285"/>
+                  <a:srgbClr val="BDB4A6"/>
                 </a:solidFill>
                 <a:latin typeface="PingFang TC" pitchFamily="34" charset="0"/>
                 <a:ea typeface="PingFang TC" pitchFamily="34" charset="-122"/>
@@ -5725,8 +5725,8 @@
         </p:nvSpPr>
         <p:spPr>
           <a:xfrm>
-            <a:off x="886968" y="2240280"/>
-            <a:ext cx="2057400" cy="548640"/>
+            <a:off x="886968" y="2212848"/>
+            <a:ext cx="2057400" cy="365760"/>
           </a:xfrm>
           <a:prstGeom prst="rect">
             <a:avLst/>
@@ -5764,8 +5764,8 @@
         </p:nvSpPr>
         <p:spPr>
           <a:xfrm>
-            <a:off x="886968" y="2880360"/>
-            <a:ext cx="2057400" cy="1280160"/>
+            <a:off x="886968" y="2633472"/>
+            <a:ext cx="2084832" cy="1463040"/>
           </a:xfrm>
           <a:prstGeom prst="rect">
             <a:avLst/>
@@ -5786,7 +5786,7 @@
             <a:r>
               <a:rPr lang="en-US" sz="1100" dirty="0">
                 <a:solidFill>
-                  <a:srgbClr val="9C9285"/>
+                  <a:srgbClr val="BDB4A6"/>
                 </a:solidFill>
                 <a:latin typeface="PingFang TC" pitchFamily="34" charset="0"/>
                 <a:ea typeface="PingFang TC" pitchFamily="34" charset="-122"/>
@@ -5851,8 +5851,8 @@
         </p:nvSpPr>
         <p:spPr>
           <a:xfrm>
-            <a:off x="3602736" y="2240280"/>
-            <a:ext cx="2057400" cy="548640"/>
+            <a:off x="3602736" y="2212848"/>
+            <a:ext cx="2057400" cy="365760"/>
           </a:xfrm>
           <a:prstGeom prst="rect">
             <a:avLst/>
@@ -5890,8 +5890,8 @@
         </p:nvSpPr>
         <p:spPr>
           <a:xfrm>
-            <a:off x="3602736" y="2880360"/>
-            <a:ext cx="2057400" cy="1280160"/>
+            <a:off x="3602736" y="2633472"/>
+            <a:ext cx="2084832" cy="1463040"/>
           </a:xfrm>
           <a:prstGeom prst="rect">
             <a:avLst/>
@@ -5912,13 +5912,13 @@
             <a:r>
               <a:rPr lang="en-US" sz="1100" dirty="0">
                 <a:solidFill>
-                  <a:srgbClr val="9C9285"/>
-                </a:solidFill>
-                <a:latin typeface="PingFang TC" pitchFamily="34" charset="0"/>
-                <a:ea typeface="PingFang TC" pitchFamily="34" charset="-122"/>
-                <a:cs typeface="PingFang TC" pitchFamily="34" charset="-120"/>
-              </a:rPr>
-              <a:t>依模型精度、材質表現與授權需求另行評估報價，會談時一併釐清。</a:t>
+                  <a:srgbClr val="BDB4A6"/>
+                </a:solidFill>
+                <a:latin typeface="PingFang TC" pitchFamily="34" charset="0"/>
+                <a:ea typeface="PingFang TC" pitchFamily="34" charset="-122"/>
+                <a:cs typeface="PingFang TC" pitchFamily="34" charset="-120"/>
+              </a:rPr>
+              <a:t>依模型精度、材質表現與授權需求另行評估報價，會談時一併釐清，不悶著算。</a:t>
             </a:r>
             <a:endParaRPr lang="en-US" sz="1100" dirty="0"/>
           </a:p>
@@ -5977,8 +5977,8 @@
         </p:nvSpPr>
         <p:spPr>
           <a:xfrm>
-            <a:off x="6318504" y="2240280"/>
-            <a:ext cx="2057400" cy="548640"/>
+            <a:off x="6318504" y="2212848"/>
+            <a:ext cx="2057400" cy="365760"/>
           </a:xfrm>
           <a:prstGeom prst="rect">
             <a:avLst/>
@@ -6016,8 +6016,8 @@
         </p:nvSpPr>
         <p:spPr>
           <a:xfrm>
-            <a:off x="6318504" y="2880360"/>
-            <a:ext cx="2057400" cy="1280160"/>
+            <a:off x="6318504" y="2633472"/>
+            <a:ext cx="2084832" cy="1463040"/>
           </a:xfrm>
           <a:prstGeom prst="rect">
             <a:avLst/>
@@ -6038,7 +6038,7 @@
             <a:r>
               <a:rPr lang="en-US" sz="1100" dirty="0">
                 <a:solidFill>
-                  <a:srgbClr val="9C9285"/>
+                  <a:srgbClr val="BDB4A6"/>
                 </a:solidFill>
                 <a:latin typeface="PingFang TC" pitchFamily="34" charset="0"/>
                 <a:ea typeface="PingFang TC" pitchFamily="34" charset="-122"/>
@@ -6227,7 +6227,7 @@
         </p:nvSpPr>
         <p:spPr>
           <a:xfrm>
-            <a:off x="658368" y="1527048"/>
+            <a:off x="658368" y="1417320"/>
             <a:ext cx="685800" cy="502920"/>
           </a:xfrm>
           <a:prstGeom prst="rect">
@@ -6327,7 +6327,7 @@
             <a:r>
               <a:rPr lang="en-US" sz="1150" dirty="0">
                 <a:solidFill>
-                  <a:srgbClr val="9C9285"/>
+                  <a:srgbClr val="BDB4A6"/>
                 </a:solidFill>
                 <a:latin typeface="PingFang TC" pitchFamily="34" charset="0"/>
                 <a:ea typeface="PingFang TC" pitchFamily="34" charset="-122"/>
@@ -6370,7 +6370,7 @@
         </p:nvSpPr>
         <p:spPr>
           <a:xfrm>
-            <a:off x="658368" y="2578608"/>
+            <a:off x="658368" y="2468880"/>
             <a:ext cx="685800" cy="502920"/>
           </a:xfrm>
           <a:prstGeom prst="rect">
@@ -6470,13 +6470,13 @@
             <a:r>
               <a:rPr lang="en-US" sz="1150" dirty="0">
                 <a:solidFill>
-                  <a:srgbClr val="9C9285"/>
-                </a:solidFill>
-                <a:latin typeface="PingFang TC" pitchFamily="34" charset="0"/>
-                <a:ea typeface="PingFang TC" pitchFamily="34" charset="-122"/>
-                <a:cs typeface="PingFang TC" pitchFamily="34" charset="-120"/>
-              </a:rPr>
-              <a:t>交付 WP 可整合版本，互動效果不打折。既有網站架構的團隊可直接採用。</a:t>
+                  <a:srgbClr val="BDB4A6"/>
+                </a:solidFill>
+                <a:latin typeface="PingFang TC" pitchFamily="34" charset="0"/>
+                <a:ea typeface="PingFang TC" pitchFamily="34" charset="-122"/>
+                <a:cs typeface="PingFang TC" pitchFamily="34" charset="-120"/>
+              </a:rPr>
+              <a:t>交付 WP 可整合版本，互動效果不打折。既有網站架構的團隊可以直接採用。</a:t>
             </a:r>
             <a:endParaRPr lang="en-US" sz="1150" dirty="0"/>
           </a:p>
@@ -6513,7 +6513,7 @@
         </p:nvSpPr>
         <p:spPr>
           <a:xfrm>
-            <a:off x="658368" y="3630168"/>
+            <a:off x="658368" y="3520440"/>
             <a:ext cx="685800" cy="502920"/>
           </a:xfrm>
           <a:prstGeom prst="rect">
@@ -6613,13 +6613,13 @@
             <a:r>
               <a:rPr lang="en-US" sz="1150" dirty="0">
                 <a:solidFill>
-                  <a:srgbClr val="9C9285"/>
-                </a:solidFill>
-                <a:latin typeface="PingFang TC" pitchFamily="34" charset="0"/>
-                <a:ea typeface="PingFang TC" pitchFamily="34" charset="-122"/>
-                <a:cs typeface="PingFang TC" pitchFamily="34" charset="-120"/>
-              </a:rPr>
-              <a:t>行動裝置優先保清晰與速度，互動密度依裝置能力分級。舊裝置優雅退場，不是事後補救。</a:t>
+                  <a:srgbClr val="BDB4A6"/>
+                </a:solidFill>
+                <a:latin typeface="PingFang TC" pitchFamily="34" charset="0"/>
+                <a:ea typeface="PingFang TC" pitchFamily="34" charset="-122"/>
+                <a:cs typeface="PingFang TC" pitchFamily="34" charset="-120"/>
+              </a:rPr>
+              <a:t>行動裝置優先保清晰與速度，互動密度依裝置能力分級——舊裝置優雅退場，不是事後補救。</a:t>
             </a:r>
             <a:endParaRPr lang="en-US" sz="1150" dirty="0"/>
           </a:p>
@@ -6827,7 +6827,7 @@
         </p:nvSpPr>
         <p:spPr>
           <a:xfrm>
-            <a:off x="932688" y="1691640"/>
+            <a:off x="932688" y="1664208"/>
             <a:ext cx="3383280" cy="274320"/>
           </a:xfrm>
           <a:prstGeom prst="rect">
@@ -6866,24 +6866,24 @@
         </p:nvSpPr>
         <p:spPr>
           <a:xfrm>
-            <a:off x="932688" y="2011680"/>
-            <a:ext cx="3474720" cy="777240"/>
-          </a:xfrm>
-          <a:prstGeom prst="rect">
-            <a:avLst/>
-          </a:prstGeom>
-          <a:noFill/>
-          <a:ln/>
-        </p:spPr>
-        <p:txBody>
-          <a:bodyPr wrap="square" lIns="0" tIns="0" rIns="0" bIns="0" rtlCol="0" anchor="ctr"/>
-          <a:lstStyle/>
-          <a:p>
-            <a:pPr indent="0" marL="0">
-              <a:buNone/>
-            </a:pPr>
-            <a:r>
-              <a:rPr lang="en-US" sz="4400" b="1" dirty="0">
+            <a:off x="932688" y="2029968"/>
+            <a:ext cx="3611880" cy="685800"/>
+          </a:xfrm>
+          <a:prstGeom prst="rect">
+            <a:avLst/>
+          </a:prstGeom>
+          <a:noFill/>
+          <a:ln/>
+        </p:spPr>
+        <p:txBody>
+          <a:bodyPr wrap="square" lIns="0" tIns="0" rIns="0" bIns="0" rtlCol="0" anchor="ctr"/>
+          <a:lstStyle/>
+          <a:p>
+            <a:pPr indent="0" marL="0">
+              <a:buNone/>
+            </a:pPr>
+            <a:r>
+              <a:rPr lang="en-US" sz="3800" b="1" dirty="0">
                 <a:solidFill>
                   <a:srgbClr val="C9A15E"/>
                 </a:solidFill>
@@ -6893,7 +6893,7 @@
               </a:rPr>
               <a:t>NT$168,000</a:t>
             </a:r>
-            <a:endParaRPr lang="en-US" sz="4400" dirty="0"/>
+            <a:endParaRPr lang="en-US" sz="3800" dirty="0"/>
           </a:p>
         </p:txBody>
       </p:sp>
@@ -6905,8 +6905,8 @@
         </p:nvSpPr>
         <p:spPr>
           <a:xfrm>
-            <a:off x="932688" y="2880360"/>
-            <a:ext cx="3383280" cy="594360"/>
+            <a:off x="932688" y="2907792"/>
+            <a:ext cx="3383280" cy="640080"/>
           </a:xfrm>
           <a:prstGeom prst="rect">
             <a:avLst/>
@@ -6967,7 +6967,7 @@
         </p:nvSpPr>
         <p:spPr>
           <a:xfrm>
-            <a:off x="932688" y="3977640"/>
+            <a:off x="932688" y="3950208"/>
             <a:ext cx="3474720" cy="320040"/>
           </a:xfrm>
           <a:prstGeom prst="rect">
@@ -7084,7 +7084,7 @@
             <a:r>
               <a:rPr lang="en-US" sz="1200" dirty="0">
                 <a:solidFill>
-                  <a:srgbClr val="9C9285"/>
+                  <a:srgbClr val="BDB4A6"/>
                 </a:solidFill>
                 <a:latin typeface="PingFang TC" pitchFamily="34" charset="0"/>
                 <a:ea typeface="PingFang TC" pitchFamily="34" charset="-122"/>
@@ -7143,7 +7143,7 @@
             <a:r>
               <a:rPr lang="en-US" sz="1200" dirty="0">
                 <a:solidFill>
-                  <a:srgbClr val="9C9285"/>
+                  <a:srgbClr val="BDB4A6"/>
                 </a:solidFill>
                 <a:latin typeface="PingFang TC" pitchFamily="34" charset="0"/>
                 <a:ea typeface="PingFang TC" pitchFamily="34" charset="-122"/>
@@ -7202,7 +7202,7 @@
             <a:r>
               <a:rPr lang="en-US" sz="1200" dirty="0">
                 <a:solidFill>
-                  <a:srgbClr val="9C9285"/>
+                  <a:srgbClr val="BDB4A6"/>
                 </a:solidFill>
                 <a:latin typeface="PingFang TC" pitchFamily="34" charset="0"/>
                 <a:ea typeface="PingFang TC" pitchFamily="34" charset="-122"/>
@@ -7222,7 +7222,7 @@
         </p:nvSpPr>
         <p:spPr>
           <a:xfrm>
-            <a:off x="5029200" y="3977640"/>
+            <a:off x="5029200" y="3950208"/>
             <a:ext cx="3474720" cy="457200"/>
           </a:xfrm>
           <a:prstGeom prst="rect">

--- a/brag-output/sales-kit/sales-kit-deck.pptx
+++ b/brag-output/sales-kit/sales-kit-deck.pptx
@@ -6476,7 +6476,7 @@
                 <a:ea typeface="PingFang TC" pitchFamily="34" charset="-122"/>
                 <a:cs typeface="PingFang TC" pitchFamily="34" charset="-120"/>
               </a:rPr>
-              <a:t>交付 WP 可整合版本，互動效果不打折。既有網站架構的團隊可以直接採用。</a:t>
+              <a:t>交付 WP 可整合版本，互動效果不打折——既有網站可直接沿用。</a:t>
             </a:r>
             <a:endParaRPr lang="en-US" sz="1150" dirty="0"/>
           </a:p>

--- a/brag-output/sales-kit/sales-kit-deck.pptx
+++ b/brag-output/sales-kit/sales-kit-deck.pptx
@@ -1906,8 +1906,8 @@
         </p:nvSpPr>
         <p:spPr>
           <a:xfrm>
-            <a:off x="5760720" y="4498848"/>
-            <a:ext cx="2743200" cy="274320"/>
+            <a:off x="2560320" y="4498848"/>
+            <a:ext cx="5943600" cy="274320"/>
           </a:xfrm>
           <a:prstGeom prst="rect">
             <a:avLst/>
@@ -1923,7 +1923,7 @@
               <a:buNone/>
             </a:pPr>
             <a:r>
-              <a:rPr lang="en-US" sz="1100" dirty="0">
+              <a:rPr lang="en-US" sz="1050" dirty="0">
                 <a:solidFill>
                   <a:srgbClr val="C9A15E"/>
                 </a:solidFill>
@@ -1931,9 +1931,9 @@
                 <a:ea typeface="Georgia" pitchFamily="34" charset="-122"/>
                 <a:cs typeface="Georgia" pitchFamily="34" charset="-120"/>
               </a:rPr>
-              <a:t>harryfan.github.io/blog</a:t>
-            </a:r>
-            <a:endParaRPr lang="en-US" sz="1100" dirty="0"/>
+              <a:t>harry750110@gmail.com · LINE: harryvan · harryfan.github.io/blog</a:t>
+            </a:r>
+            <a:endParaRPr lang="en-US" sz="1050" dirty="0"/>
           </a:p>
         </p:txBody>
       </p:sp>
@@ -2521,7 +2521,7 @@
               <a:buNone/>
             </a:pPr>
             <a:r>
-              <a:rPr lang="en-US" sz="1150" dirty="0">
+              <a:rPr lang="en-US" sz="1100" dirty="0">
                 <a:solidFill>
                   <a:srgbClr val="C9A15E"/>
                 </a:solidFill>
@@ -2529,9 +2529,9 @@
                 <a:ea typeface="Georgia" pitchFamily="34" charset="-122"/>
                 <a:cs typeface="Georgia" pitchFamily="34" charset="-120"/>
               </a:rPr>
-              <a:t>Harry Fan · harryfan.github.io/blog</a:t>
-            </a:r>
-            <a:endParaRPr lang="en-US" sz="1150" dirty="0"/>
+              <a:t>harry750110@gmail.com · LINE: harryvan</a:t>
+            </a:r>
+            <a:endParaRPr lang="en-US" sz="1100" dirty="0"/>
           </a:p>
         </p:txBody>
       </p:sp>
